--- a/服薬/AI×服薬管理.pptx
+++ b/服薬/AI×服薬管理.pptx
@@ -7716,7 +7716,7 @@
           <a:p>
             <a:fld id="{07DEC344-23C3-4748-AEDF-3FDB69B6A420}" type="datetimeFigureOut">
               <a:rPr kumimoji="1" lang="ja-JP" altLang="en-US" smtClean="0"/>
-              <a:t>2025/12/3</a:t>
+              <a:t>2026/2/26</a:t>
             </a:fld>
             <a:endParaRPr kumimoji="1" lang="ja-JP" altLang="en-US"/>
           </a:p>
@@ -8219,6 +8219,13 @@
               <a:rPr lang="ja-JP" altLang="en-US" dirty="0"/>
               <a:t>ための介入が可能になります。</a:t>
             </a:r>
+            <a:endParaRPr lang="en-US" altLang="ja-JP" dirty="0"/>
+          </a:p>
+          <a:p>
+            <a:r>
+              <a:rPr lang="ja-JP" altLang="en-US" dirty="0"/>
+              <a:t>さらに患者側が記録したデータも見ることができるので服薬状況も確認することができます。</a:t>
+            </a:r>
             <a:r>
               <a:rPr lang="en-US" altLang="ja-JP" dirty="0"/>
               <a:t>(</a:t>
@@ -8328,7 +8335,7 @@
             </a:r>
             <a:r>
               <a:rPr lang="ja-JP" altLang="en-US" b="0" dirty="0"/>
-              <a:t>患者の名前、生年月日を入力します。</a:t>
+              <a:t>患者の名前、生年月日、診察券番号を入力します。</a:t>
             </a:r>
             <a:endParaRPr lang="en-US" altLang="ja-JP" b="0" dirty="0"/>
           </a:p>
@@ -8343,7 +8350,7 @@
             </a:r>
             <a:r>
               <a:rPr lang="ja-JP" altLang="en-US" dirty="0"/>
-              <a:t>と一致するかを照合します。例えばこの名前・生年月日はシステムに存在するか？です。</a:t>
+              <a:t>と一致するかを照合します。例えばこの名前・生年月日・診察券番号はシステムに存在するか？です。</a:t>
             </a:r>
             <a:endParaRPr lang="en-US" altLang="ja-JP" dirty="0"/>
           </a:p>
@@ -8837,278 +8844,126 @@
           <a:lstStyle/>
           <a:p>
             <a:r>
-              <a:rPr kumimoji="1" lang="ja-JP" altLang="ja-JP" sz="1200" kern="1200" dirty="0">
-                <a:solidFill>
-                  <a:schemeClr val="tx1"/>
-                </a:solidFill>
-                <a:effectLst/>
-                <a:latin typeface="+mn-lt"/>
-                <a:ea typeface="+mn-ea"/>
-                <a:cs typeface="+mn-cs"/>
-              </a:rPr>
-              <a:t>効果、展望です</a:t>
-            </a:r>
-          </a:p>
-          <a:p>
-            <a:r>
-              <a:rPr kumimoji="1" lang="ja-JP" altLang="ja-JP" sz="1200" kern="1200" dirty="0">
-                <a:solidFill>
-                  <a:schemeClr val="tx1"/>
-                </a:solidFill>
-                <a:effectLst/>
-                <a:latin typeface="+mn-lt"/>
-                <a:ea typeface="+mn-ea"/>
-                <a:cs typeface="+mn-cs"/>
-              </a:rPr>
-              <a:t>この仕組みが実現すると、まず薬局の負担が大幅に減ります。</a:t>
-            </a:r>
-            <a:br>
-              <a:rPr kumimoji="1" lang="en-US" altLang="ja-JP" sz="1200" kern="1200" dirty="0">
-                <a:solidFill>
-                  <a:schemeClr val="tx1"/>
-                </a:solidFill>
-                <a:effectLst/>
-                <a:latin typeface="+mn-lt"/>
-                <a:ea typeface="+mn-ea"/>
-                <a:cs typeface="+mn-cs"/>
-              </a:rPr>
-            </a:br>
-            <a:r>
-              <a:rPr kumimoji="1" lang="ja-JP" altLang="ja-JP" sz="1200" kern="1200" dirty="0">
-                <a:solidFill>
-                  <a:schemeClr val="tx1"/>
-                </a:solidFill>
-                <a:effectLst/>
-                <a:latin typeface="+mn-lt"/>
-                <a:ea typeface="+mn-ea"/>
-                <a:cs typeface="+mn-cs"/>
-              </a:rPr>
-              <a:t>患者さんの服薬状況が可視化されるため、わざわざ電話で確認したり、</a:t>
-            </a:r>
-            <a:br>
-              <a:rPr kumimoji="1" lang="en-US" altLang="ja-JP" sz="1200" kern="1200" dirty="0">
-                <a:solidFill>
-                  <a:schemeClr val="tx1"/>
-                </a:solidFill>
-                <a:effectLst/>
-                <a:latin typeface="+mn-lt"/>
-                <a:ea typeface="+mn-ea"/>
-                <a:cs typeface="+mn-cs"/>
-              </a:rPr>
-            </a:br>
-            <a:r>
-              <a:rPr kumimoji="1" lang="en-US" altLang="ja-JP" sz="1200" kern="1200" dirty="0">
-                <a:solidFill>
-                  <a:schemeClr val="tx1"/>
-                </a:solidFill>
-                <a:effectLst/>
-                <a:latin typeface="+mn-lt"/>
-                <a:ea typeface="+mn-ea"/>
-                <a:cs typeface="+mn-cs"/>
-              </a:rPr>
-              <a:t>“</a:t>
-            </a:r>
-            <a:r>
-              <a:rPr kumimoji="1" lang="ja-JP" altLang="ja-JP" sz="1200" kern="1200" dirty="0">
-                <a:solidFill>
-                  <a:schemeClr val="tx1"/>
-                </a:solidFill>
-                <a:effectLst/>
-                <a:latin typeface="+mn-lt"/>
-                <a:ea typeface="+mn-ea"/>
-                <a:cs typeface="+mn-cs"/>
-              </a:rPr>
-              <a:t>飲めているか分からない</a:t>
-            </a:r>
-            <a:r>
-              <a:rPr kumimoji="1" lang="en-US" altLang="ja-JP" sz="1200" kern="1200" dirty="0">
-                <a:solidFill>
-                  <a:schemeClr val="tx1"/>
-                </a:solidFill>
-                <a:effectLst/>
-                <a:latin typeface="+mn-lt"/>
-                <a:ea typeface="+mn-ea"/>
-                <a:cs typeface="+mn-cs"/>
-              </a:rPr>
-              <a:t>”</a:t>
-            </a:r>
-            <a:r>
-              <a:rPr kumimoji="1" lang="ja-JP" altLang="ja-JP" sz="1200" kern="1200" dirty="0">
-                <a:solidFill>
-                  <a:schemeClr val="tx1"/>
-                </a:solidFill>
-                <a:effectLst/>
-                <a:latin typeface="+mn-lt"/>
-                <a:ea typeface="+mn-ea"/>
-                <a:cs typeface="+mn-cs"/>
-              </a:rPr>
-              <a:t>状態でフォローする必要がなくなるからです。</a:t>
-            </a:r>
-          </a:p>
-          <a:p>
-            <a:r>
-              <a:rPr kumimoji="1" lang="ja-JP" altLang="ja-JP" sz="1200" kern="1200" dirty="0">
-                <a:solidFill>
-                  <a:schemeClr val="tx1"/>
-                </a:solidFill>
-                <a:effectLst/>
-                <a:latin typeface="+mn-lt"/>
-                <a:ea typeface="+mn-ea"/>
-                <a:cs typeface="+mn-cs"/>
-              </a:rPr>
-              <a:t>さらに、飲み忘れによる病状悪化や再入院のリスクが下がることで、</a:t>
-            </a:r>
-            <a:br>
-              <a:rPr kumimoji="1" lang="en-US" altLang="ja-JP" sz="1200" kern="1200" dirty="0">
-                <a:solidFill>
-                  <a:schemeClr val="tx1"/>
-                </a:solidFill>
-                <a:effectLst/>
-                <a:latin typeface="+mn-lt"/>
-                <a:ea typeface="+mn-ea"/>
-                <a:cs typeface="+mn-cs"/>
-              </a:rPr>
-            </a:br>
-            <a:r>
-              <a:rPr kumimoji="1" lang="ja-JP" altLang="ja-JP" sz="1200" kern="1200" dirty="0">
-                <a:solidFill>
-                  <a:schemeClr val="tx1"/>
-                </a:solidFill>
-                <a:effectLst/>
-                <a:latin typeface="+mn-lt"/>
-                <a:ea typeface="+mn-ea"/>
-                <a:cs typeface="+mn-cs"/>
-              </a:rPr>
-              <a:t>医療費全体の削減にもつながります。</a:t>
-            </a:r>
-            <a:br>
-              <a:rPr kumimoji="1" lang="en-US" altLang="ja-JP" sz="1200" kern="1200" dirty="0">
-                <a:solidFill>
-                  <a:schemeClr val="tx1"/>
-                </a:solidFill>
-                <a:effectLst/>
-                <a:latin typeface="+mn-lt"/>
-                <a:ea typeface="+mn-ea"/>
-                <a:cs typeface="+mn-cs"/>
-              </a:rPr>
-            </a:br>
-            <a:r>
-              <a:rPr kumimoji="1" lang="ja-JP" altLang="ja-JP" sz="1200" kern="1200" dirty="0">
-                <a:solidFill>
-                  <a:schemeClr val="tx1"/>
-                </a:solidFill>
-                <a:effectLst/>
-                <a:latin typeface="+mn-lt"/>
-                <a:ea typeface="+mn-ea"/>
-                <a:cs typeface="+mn-cs"/>
-              </a:rPr>
-              <a:t>これは患者さん個人だけではなく、医療保険や社会全体にとって大きなメリットになります。</a:t>
-            </a:r>
-          </a:p>
-          <a:p>
-            <a:r>
-              <a:rPr kumimoji="1" lang="ja-JP" altLang="ja-JP" sz="1200" kern="1200" dirty="0">
-                <a:solidFill>
-                  <a:schemeClr val="tx1"/>
-                </a:solidFill>
-                <a:effectLst/>
-                <a:latin typeface="+mn-lt"/>
-                <a:ea typeface="+mn-ea"/>
-                <a:cs typeface="+mn-cs"/>
-              </a:rPr>
-              <a:t>また、この仕組みは単なるアプリではなく、</a:t>
-            </a:r>
-            <a:br>
-              <a:rPr kumimoji="1" lang="en-US" altLang="ja-JP" sz="1200" kern="1200" dirty="0">
-                <a:solidFill>
-                  <a:schemeClr val="tx1"/>
-                </a:solidFill>
-                <a:effectLst/>
-                <a:latin typeface="+mn-lt"/>
-                <a:ea typeface="+mn-ea"/>
-                <a:cs typeface="+mn-cs"/>
-              </a:rPr>
-            </a:br>
-            <a:r>
-              <a:rPr kumimoji="1" lang="ja-JP" altLang="ja-JP" sz="1200" kern="1200" dirty="0">
-                <a:solidFill>
-                  <a:schemeClr val="tx1"/>
-                </a:solidFill>
-                <a:effectLst/>
-                <a:latin typeface="+mn-lt"/>
-                <a:ea typeface="+mn-ea"/>
-                <a:cs typeface="+mn-cs"/>
-              </a:rPr>
-              <a:t>『見える化』と『継続支援』を組み合わせることで、</a:t>
-            </a:r>
-            <a:br>
-              <a:rPr kumimoji="1" lang="en-US" altLang="ja-JP" sz="1200" kern="1200" dirty="0">
-                <a:solidFill>
-                  <a:schemeClr val="tx1"/>
-                </a:solidFill>
-                <a:effectLst/>
-                <a:latin typeface="+mn-lt"/>
-                <a:ea typeface="+mn-ea"/>
-                <a:cs typeface="+mn-cs"/>
-              </a:rPr>
-            </a:br>
-            <a:r>
-              <a:rPr kumimoji="1" lang="ja-JP" altLang="ja-JP" sz="1200" kern="1200" dirty="0">
-                <a:solidFill>
-                  <a:schemeClr val="tx1"/>
-                </a:solidFill>
-                <a:effectLst/>
-                <a:latin typeface="+mn-lt"/>
-                <a:ea typeface="+mn-ea"/>
-                <a:cs typeface="+mn-cs"/>
-              </a:rPr>
-              <a:t>患者さんの健康維持と薬局の業務効率化を同時に実現できる点が特徴です。</a:t>
-            </a:r>
-            <a:r>
-              <a:rPr kumimoji="1" lang="en-US" altLang="ja-JP" sz="1200" kern="1200" dirty="0">
-                <a:solidFill>
-                  <a:schemeClr val="tx1"/>
-                </a:solidFill>
-                <a:effectLst/>
-                <a:latin typeface="+mn-lt"/>
-                <a:ea typeface="+mn-ea"/>
-                <a:cs typeface="+mn-cs"/>
-              </a:rPr>
+              <a:rPr kumimoji="1" lang="ja-JP" altLang="en-US" dirty="0"/>
+              <a:t>技術構成は次の通りです。</a:t>
+            </a:r>
+            <a:endParaRPr kumimoji="1" lang="en-US" altLang="ja-JP" dirty="0"/>
+          </a:p>
+          <a:p>
+            <a:r>
+              <a:rPr kumimoji="1" lang="ja-JP" altLang="en-US" dirty="0"/>
+              <a:t>フロントエンドに</a:t>
+            </a:r>
+            <a:r>
+              <a:rPr kumimoji="1" lang="en-US" altLang="ja-JP" dirty="0" err="1"/>
+              <a:t>HTML,CSS,JavaScript</a:t>
+            </a:r>
+            <a:r>
+              <a:rPr kumimoji="1" lang="ja-JP" altLang="en-US" dirty="0"/>
+              <a:t>を活用しています。</a:t>
+            </a:r>
+            <a:endParaRPr kumimoji="1" lang="en-US" altLang="ja-JP" dirty="0"/>
+          </a:p>
+          <a:p>
+            <a:r>
+              <a:rPr kumimoji="1" lang="ja-JP" altLang="en-US" dirty="0"/>
+              <a:t>バックエンドは</a:t>
+            </a:r>
+            <a:r>
+              <a:rPr kumimoji="1" lang="en-US" altLang="ja-JP" dirty="0"/>
+              <a:t>PHP</a:t>
+            </a:r>
+            <a:r>
+              <a:rPr kumimoji="1" lang="ja-JP" altLang="en-US" dirty="0"/>
+              <a:t>を活用しています。</a:t>
+            </a:r>
+            <a:endParaRPr kumimoji="1" lang="en-US" altLang="ja-JP" dirty="0"/>
+          </a:p>
+          <a:p>
+            <a:r>
+              <a:rPr kumimoji="1" lang="ja-JP" altLang="en-US" dirty="0"/>
+              <a:t>データベースは</a:t>
+            </a:r>
+            <a:r>
+              <a:rPr kumimoji="1" lang="en-US" altLang="ja-JP" dirty="0" err="1"/>
+              <a:t>phpMyadmin</a:t>
+            </a:r>
+            <a:r>
+              <a:rPr kumimoji="1" lang="ja-JP" altLang="en-US" dirty="0"/>
+              <a:t>を活用しています。</a:t>
+            </a:r>
+            <a:endParaRPr kumimoji="1" lang="en-US" altLang="ja-JP" dirty="0"/>
+          </a:p>
+          <a:p>
+            <a:r>
+              <a:rPr kumimoji="1" lang="ja-JP" altLang="en-US" dirty="0"/>
+              <a:t>稼働環境は</a:t>
+            </a:r>
+            <a:r>
+              <a:rPr kumimoji="1" lang="en-US" altLang="ja-JP" dirty="0" err="1"/>
+              <a:t>xampp,web</a:t>
+            </a:r>
+            <a:r>
+              <a:rPr kumimoji="1" lang="ja-JP" altLang="en-US" dirty="0"/>
+              <a:t>サーバーです。</a:t>
+            </a:r>
+            <a:endParaRPr kumimoji="1" lang="en-US" altLang="ja-JP" dirty="0"/>
+          </a:p>
+          <a:p>
+            <a:r>
+              <a:rPr kumimoji="1" lang="en-US" altLang="ja-JP" dirty="0"/>
+              <a:t>API</a:t>
+            </a:r>
+            <a:r>
+              <a:rPr kumimoji="1" lang="ja-JP" altLang="en-US" dirty="0"/>
+              <a:t>は</a:t>
+            </a:r>
+            <a:r>
+              <a:rPr kumimoji="1" lang="en-US" altLang="ja-JP" dirty="0" err="1"/>
+              <a:t>Everypixel</a:t>
+            </a:r>
+            <a:r>
+              <a:rPr kumimoji="1" lang="ja-JP" altLang="en-US" dirty="0"/>
+              <a:t>という画像認識</a:t>
+            </a:r>
+            <a:r>
+              <a:rPr kumimoji="1" lang="en-US" altLang="ja-JP" dirty="0" err="1"/>
+              <a:t>api</a:t>
+            </a:r>
+            <a:r>
+              <a:rPr kumimoji="1" lang="ja-JP" altLang="en-US" dirty="0"/>
+              <a:t>を使っています。</a:t>
+            </a:r>
+            <a:endParaRPr kumimoji="1" lang="en-US" altLang="ja-JP" dirty="0"/>
+          </a:p>
+          <a:p>
+            <a:r>
+              <a:rPr kumimoji="1" lang="ja-JP" altLang="en-US" dirty="0"/>
+              <a:t>バージョン管理は</a:t>
+            </a:r>
+            <a:r>
+              <a:rPr kumimoji="1" lang="en-US" altLang="ja-JP" dirty="0" err="1"/>
+              <a:t>github</a:t>
+            </a:r>
+            <a:r>
+              <a:rPr kumimoji="1" lang="ja-JP" altLang="en-US" dirty="0"/>
+              <a:t>で行っています。</a:t>
+            </a:r>
+            <a:r>
+              <a:rPr kumimoji="1" lang="en-US" altLang="ja-JP" dirty="0"/>
               <a:t>(</a:t>
             </a:r>
             <a:r>
-              <a:rPr kumimoji="1" lang="ja-JP" altLang="ja-JP" sz="1200" kern="1200" dirty="0">
-                <a:solidFill>
-                  <a:schemeClr val="tx1"/>
-                </a:solidFill>
-                <a:effectLst/>
-                <a:latin typeface="+mn-lt"/>
-                <a:ea typeface="+mn-ea"/>
-                <a:cs typeface="+mn-cs"/>
-              </a:rPr>
+              <a:rPr kumimoji="1" lang="ja-JP" altLang="en-US" dirty="0"/>
               <a:t>高橋</a:t>
             </a:r>
             <a:r>
-              <a:rPr kumimoji="1" lang="en-US" altLang="ja-JP" sz="1200" kern="1200" dirty="0">
-                <a:solidFill>
-                  <a:schemeClr val="tx1"/>
-                </a:solidFill>
-                <a:effectLst/>
-                <a:latin typeface="+mn-lt"/>
-                <a:ea typeface="+mn-ea"/>
-                <a:cs typeface="+mn-cs"/>
-              </a:rPr>
+              <a:rPr kumimoji="1" lang="en-US" altLang="ja-JP" dirty="0"/>
               <a:t>)</a:t>
             </a:r>
-            <a:endParaRPr kumimoji="1" lang="ja-JP" altLang="ja-JP" sz="1200" kern="1200" dirty="0">
-              <a:solidFill>
-                <a:schemeClr val="tx1"/>
-              </a:solidFill>
-              <a:effectLst/>
-              <a:latin typeface="+mn-lt"/>
-              <a:ea typeface="+mn-ea"/>
-              <a:cs typeface="+mn-cs"/>
-            </a:endParaRPr>
+          </a:p>
+          <a:p>
+            <a:endParaRPr kumimoji="1" lang="en-US" altLang="ja-JP" dirty="0"/>
           </a:p>
           <a:p>
             <a:endParaRPr kumimoji="1" lang="ja-JP" altLang="en-US" dirty="0"/>
@@ -9132,6 +8987,365 @@
           <a:p>
             <a:fld id="{0F42E968-90FD-4F25-A217-59DBD6DA5208}" type="slidenum">
               <a:rPr kumimoji="1" lang="ja-JP" altLang="en-US" smtClean="0"/>
+              <a:t>13</a:t>
+            </a:fld>
+            <a:endParaRPr kumimoji="1" lang="ja-JP" altLang="en-US"/>
+          </a:p>
+        </p:txBody>
+      </p:sp>
+    </p:spTree>
+    <p:extLst>
+      <p:ext uri="{BB962C8B-B14F-4D97-AF65-F5344CB8AC3E}">
+        <p14:creationId xmlns:p14="http://schemas.microsoft.com/office/powerpoint/2010/main" val="2294071361"/>
+      </p:ext>
+    </p:extLst>
+  </p:cSld>
+  <p:clrMapOvr>
+    <a:masterClrMapping/>
+  </p:clrMapOvr>
+</p:notes>
+</file>
+
+<file path=ppt/notesSlides/notesSlide14.xml><?xml version="1.0" encoding="utf-8"?>
+<p:notes xmlns:a="http://schemas.openxmlformats.org/drawingml/2006/main" xmlns:r="http://schemas.openxmlformats.org/officeDocument/2006/relationships" xmlns:p="http://schemas.openxmlformats.org/presentationml/2006/main">
+  <p:cSld>
+    <p:spTree>
+      <p:nvGrpSpPr>
+        <p:cNvPr id="1" name=""/>
+        <p:cNvGrpSpPr/>
+        <p:nvPr/>
+      </p:nvGrpSpPr>
+      <p:grpSpPr>
+        <a:xfrm>
+          <a:off x="0" y="0"/>
+          <a:ext cx="0" cy="0"/>
+          <a:chOff x="0" y="0"/>
+          <a:chExt cx="0" cy="0"/>
+        </a:xfrm>
+      </p:grpSpPr>
+      <p:sp>
+        <p:nvSpPr>
+          <p:cNvPr id="2" name="スライド イメージ プレースホルダー 1"/>
+          <p:cNvSpPr>
+            <a:spLocks noGrp="1" noRot="1" noChangeAspect="1"/>
+          </p:cNvSpPr>
+          <p:nvPr>
+            <p:ph type="sldImg"/>
+          </p:nvPr>
+        </p:nvSpPr>
+        <p:spPr/>
+      </p:sp>
+      <p:sp>
+        <p:nvSpPr>
+          <p:cNvPr id="3" name="ノート プレースホルダー 2"/>
+          <p:cNvSpPr>
+            <a:spLocks noGrp="1"/>
+          </p:cNvSpPr>
+          <p:nvPr>
+            <p:ph type="body" idx="1"/>
+          </p:nvPr>
+        </p:nvSpPr>
+        <p:spPr/>
+        <p:txBody>
+          <a:bodyPr/>
+          <a:lstStyle/>
+          <a:p>
+            <a:r>
+              <a:rPr kumimoji="1" lang="ja-JP" altLang="ja-JP" sz="1200" kern="1200" dirty="0">
+                <a:solidFill>
+                  <a:schemeClr val="tx1"/>
+                </a:solidFill>
+                <a:effectLst/>
+                <a:latin typeface="+mn-lt"/>
+                <a:ea typeface="+mn-ea"/>
+                <a:cs typeface="+mn-cs"/>
+              </a:rPr>
+              <a:t>効果、展望です</a:t>
+            </a:r>
+          </a:p>
+          <a:p>
+            <a:r>
+              <a:rPr kumimoji="1" lang="ja-JP" altLang="ja-JP" sz="1200" kern="1200" dirty="0">
+                <a:solidFill>
+                  <a:schemeClr val="tx1"/>
+                </a:solidFill>
+                <a:effectLst/>
+                <a:latin typeface="+mn-lt"/>
+                <a:ea typeface="+mn-ea"/>
+                <a:cs typeface="+mn-cs"/>
+              </a:rPr>
+              <a:t>この仕組みが実現すると、まず薬局の負担が大幅に減ります。</a:t>
+            </a:r>
+            <a:br>
+              <a:rPr kumimoji="1" lang="en-US" altLang="ja-JP" sz="1200" kern="1200" dirty="0">
+                <a:solidFill>
+                  <a:schemeClr val="tx1"/>
+                </a:solidFill>
+                <a:effectLst/>
+                <a:latin typeface="+mn-lt"/>
+                <a:ea typeface="+mn-ea"/>
+                <a:cs typeface="+mn-cs"/>
+              </a:rPr>
+            </a:br>
+            <a:r>
+              <a:rPr kumimoji="1" lang="ja-JP" altLang="ja-JP" sz="1200" kern="1200" dirty="0">
+                <a:solidFill>
+                  <a:schemeClr val="tx1"/>
+                </a:solidFill>
+                <a:effectLst/>
+                <a:latin typeface="+mn-lt"/>
+                <a:ea typeface="+mn-ea"/>
+                <a:cs typeface="+mn-cs"/>
+              </a:rPr>
+              <a:t>患者さんの服薬状況が可視化されるため、わざわざ電話で確認したり、</a:t>
+            </a:r>
+            <a:br>
+              <a:rPr kumimoji="1" lang="en-US" altLang="ja-JP" sz="1200" kern="1200" dirty="0">
+                <a:solidFill>
+                  <a:schemeClr val="tx1"/>
+                </a:solidFill>
+                <a:effectLst/>
+                <a:latin typeface="+mn-lt"/>
+                <a:ea typeface="+mn-ea"/>
+                <a:cs typeface="+mn-cs"/>
+              </a:rPr>
+            </a:br>
+            <a:r>
+              <a:rPr kumimoji="1" lang="en-US" altLang="ja-JP" sz="1200" kern="1200" dirty="0">
+                <a:solidFill>
+                  <a:schemeClr val="tx1"/>
+                </a:solidFill>
+                <a:effectLst/>
+                <a:latin typeface="+mn-lt"/>
+                <a:ea typeface="+mn-ea"/>
+                <a:cs typeface="+mn-cs"/>
+              </a:rPr>
+              <a:t>“</a:t>
+            </a:r>
+            <a:r>
+              <a:rPr kumimoji="1" lang="ja-JP" altLang="ja-JP" sz="1200" kern="1200" dirty="0">
+                <a:solidFill>
+                  <a:schemeClr val="tx1"/>
+                </a:solidFill>
+                <a:effectLst/>
+                <a:latin typeface="+mn-lt"/>
+                <a:ea typeface="+mn-ea"/>
+                <a:cs typeface="+mn-cs"/>
+              </a:rPr>
+              <a:t>飲めているか分からない</a:t>
+            </a:r>
+            <a:r>
+              <a:rPr kumimoji="1" lang="en-US" altLang="ja-JP" sz="1200" kern="1200" dirty="0">
+                <a:solidFill>
+                  <a:schemeClr val="tx1"/>
+                </a:solidFill>
+                <a:effectLst/>
+                <a:latin typeface="+mn-lt"/>
+                <a:ea typeface="+mn-ea"/>
+                <a:cs typeface="+mn-cs"/>
+              </a:rPr>
+              <a:t>”</a:t>
+            </a:r>
+            <a:r>
+              <a:rPr kumimoji="1" lang="ja-JP" altLang="ja-JP" sz="1200" kern="1200" dirty="0">
+                <a:solidFill>
+                  <a:schemeClr val="tx1"/>
+                </a:solidFill>
+                <a:effectLst/>
+                <a:latin typeface="+mn-lt"/>
+                <a:ea typeface="+mn-ea"/>
+                <a:cs typeface="+mn-cs"/>
+              </a:rPr>
+              <a:t>状態でフォローする必要がなくなるからです。</a:t>
+            </a:r>
+          </a:p>
+          <a:p>
+            <a:r>
+              <a:rPr kumimoji="1" lang="ja-JP" altLang="ja-JP" sz="1200" kern="1200" dirty="0">
+                <a:solidFill>
+                  <a:schemeClr val="tx1"/>
+                </a:solidFill>
+                <a:effectLst/>
+                <a:latin typeface="+mn-lt"/>
+                <a:ea typeface="+mn-ea"/>
+                <a:cs typeface="+mn-cs"/>
+              </a:rPr>
+              <a:t>さらに、飲み忘れによる病状悪化や再入院のリスクが下がることで、</a:t>
+            </a:r>
+            <a:br>
+              <a:rPr kumimoji="1" lang="en-US" altLang="ja-JP" sz="1200" kern="1200" dirty="0">
+                <a:solidFill>
+                  <a:schemeClr val="tx1"/>
+                </a:solidFill>
+                <a:effectLst/>
+                <a:latin typeface="+mn-lt"/>
+                <a:ea typeface="+mn-ea"/>
+                <a:cs typeface="+mn-cs"/>
+              </a:rPr>
+            </a:br>
+            <a:r>
+              <a:rPr kumimoji="1" lang="ja-JP" altLang="ja-JP" sz="1200" kern="1200" dirty="0">
+                <a:solidFill>
+                  <a:schemeClr val="tx1"/>
+                </a:solidFill>
+                <a:effectLst/>
+                <a:latin typeface="+mn-lt"/>
+                <a:ea typeface="+mn-ea"/>
+                <a:cs typeface="+mn-cs"/>
+              </a:rPr>
+              <a:t>医療費全体の削減にもつながります。</a:t>
+            </a:r>
+            <a:br>
+              <a:rPr kumimoji="1" lang="en-US" altLang="ja-JP" sz="1200" kern="1200" dirty="0">
+                <a:solidFill>
+                  <a:schemeClr val="tx1"/>
+                </a:solidFill>
+                <a:effectLst/>
+                <a:latin typeface="+mn-lt"/>
+                <a:ea typeface="+mn-ea"/>
+                <a:cs typeface="+mn-cs"/>
+              </a:rPr>
+            </a:br>
+            <a:r>
+              <a:rPr kumimoji="1" lang="ja-JP" altLang="ja-JP" sz="1200" kern="1200" dirty="0">
+                <a:solidFill>
+                  <a:schemeClr val="tx1"/>
+                </a:solidFill>
+                <a:effectLst/>
+                <a:latin typeface="+mn-lt"/>
+                <a:ea typeface="+mn-ea"/>
+                <a:cs typeface="+mn-cs"/>
+              </a:rPr>
+              <a:t>これは患者さん個人だけではなく、医療保険や社会全体にとって大きなメリットになります。</a:t>
+            </a:r>
+          </a:p>
+          <a:p>
+            <a:r>
+              <a:rPr kumimoji="1" lang="ja-JP" altLang="ja-JP" sz="1200" kern="1200" dirty="0">
+                <a:solidFill>
+                  <a:schemeClr val="tx1"/>
+                </a:solidFill>
+                <a:effectLst/>
+                <a:latin typeface="+mn-lt"/>
+                <a:ea typeface="+mn-ea"/>
+                <a:cs typeface="+mn-cs"/>
+              </a:rPr>
+              <a:t>また、この仕組みは単なるアプリではなく、</a:t>
+            </a:r>
+            <a:br>
+              <a:rPr kumimoji="1" lang="en-US" altLang="ja-JP" sz="1200" kern="1200" dirty="0">
+                <a:solidFill>
+                  <a:schemeClr val="tx1"/>
+                </a:solidFill>
+                <a:effectLst/>
+                <a:latin typeface="+mn-lt"/>
+                <a:ea typeface="+mn-ea"/>
+                <a:cs typeface="+mn-cs"/>
+              </a:rPr>
+            </a:br>
+            <a:r>
+              <a:rPr kumimoji="1" lang="ja-JP" altLang="ja-JP" sz="1200" kern="1200" dirty="0">
+                <a:solidFill>
+                  <a:schemeClr val="tx1"/>
+                </a:solidFill>
+                <a:effectLst/>
+                <a:latin typeface="+mn-lt"/>
+                <a:ea typeface="+mn-ea"/>
+                <a:cs typeface="+mn-cs"/>
+              </a:rPr>
+              <a:t>『見える化』と『継続支援』を組み合わせることで、</a:t>
+            </a:r>
+            <a:br>
+              <a:rPr kumimoji="1" lang="en-US" altLang="ja-JP" sz="1200" kern="1200" dirty="0">
+                <a:solidFill>
+                  <a:schemeClr val="tx1"/>
+                </a:solidFill>
+                <a:effectLst/>
+                <a:latin typeface="+mn-lt"/>
+                <a:ea typeface="+mn-ea"/>
+                <a:cs typeface="+mn-cs"/>
+              </a:rPr>
+            </a:br>
+            <a:r>
+              <a:rPr kumimoji="1" lang="ja-JP" altLang="ja-JP" sz="1200" kern="1200" dirty="0">
+                <a:solidFill>
+                  <a:schemeClr val="tx1"/>
+                </a:solidFill>
+                <a:effectLst/>
+                <a:latin typeface="+mn-lt"/>
+                <a:ea typeface="+mn-ea"/>
+                <a:cs typeface="+mn-cs"/>
+              </a:rPr>
+              <a:t>患者さんの健康維持と薬局の業務効率化を同時に実現できる点が特徴です。</a:t>
+            </a:r>
+            <a:r>
+              <a:rPr kumimoji="1" lang="en-US" altLang="ja-JP" sz="1200" kern="1200" dirty="0">
+                <a:solidFill>
+                  <a:schemeClr val="tx1"/>
+                </a:solidFill>
+                <a:effectLst/>
+                <a:latin typeface="+mn-lt"/>
+                <a:ea typeface="+mn-ea"/>
+                <a:cs typeface="+mn-cs"/>
+              </a:rPr>
+              <a:t>(</a:t>
+            </a:r>
+            <a:r>
+              <a:rPr kumimoji="1" lang="ja-JP" altLang="ja-JP" sz="1200" kern="1200" dirty="0">
+                <a:solidFill>
+                  <a:schemeClr val="tx1"/>
+                </a:solidFill>
+                <a:effectLst/>
+                <a:latin typeface="+mn-lt"/>
+                <a:ea typeface="+mn-ea"/>
+                <a:cs typeface="+mn-cs"/>
+              </a:rPr>
+              <a:t>高橋</a:t>
+            </a:r>
+            <a:r>
+              <a:rPr kumimoji="1" lang="en-US" altLang="ja-JP" sz="1200" kern="1200" dirty="0">
+                <a:solidFill>
+                  <a:schemeClr val="tx1"/>
+                </a:solidFill>
+                <a:effectLst/>
+                <a:latin typeface="+mn-lt"/>
+                <a:ea typeface="+mn-ea"/>
+                <a:cs typeface="+mn-cs"/>
+              </a:rPr>
+              <a:t>)</a:t>
+            </a:r>
+            <a:endParaRPr kumimoji="1" lang="ja-JP" altLang="ja-JP" sz="1200" kern="1200" dirty="0">
+              <a:solidFill>
+                <a:schemeClr val="tx1"/>
+              </a:solidFill>
+              <a:effectLst/>
+              <a:latin typeface="+mn-lt"/>
+              <a:ea typeface="+mn-ea"/>
+              <a:cs typeface="+mn-cs"/>
+            </a:endParaRPr>
+          </a:p>
+          <a:p>
+            <a:endParaRPr kumimoji="1" lang="ja-JP" altLang="en-US" dirty="0"/>
+          </a:p>
+        </p:txBody>
+      </p:sp>
+      <p:sp>
+        <p:nvSpPr>
+          <p:cNvPr id="4" name="スライド番号プレースホルダー 3"/>
+          <p:cNvSpPr>
+            <a:spLocks noGrp="1"/>
+          </p:cNvSpPr>
+          <p:nvPr>
+            <p:ph type="sldNum" sz="quarter" idx="5"/>
+          </p:nvPr>
+        </p:nvSpPr>
+        <p:spPr/>
+        <p:txBody>
+          <a:bodyPr/>
+          <a:lstStyle/>
+          <a:p>
+            <a:fld id="{0F42E968-90FD-4F25-A217-59DBD6DA5208}" type="slidenum">
+              <a:rPr kumimoji="1" lang="ja-JP" altLang="en-US" smtClean="0"/>
               <a:t>14</a:t>
             </a:fld>
             <a:endParaRPr kumimoji="1" lang="ja-JP" altLang="en-US"/>
@@ -9142,6 +9356,320 @@
     <p:extLst>
       <p:ext uri="{BB962C8B-B14F-4D97-AF65-F5344CB8AC3E}">
         <p14:creationId xmlns:p14="http://schemas.microsoft.com/office/powerpoint/2010/main" val="2940338753"/>
+      </p:ext>
+    </p:extLst>
+  </p:cSld>
+  <p:clrMapOvr>
+    <a:masterClrMapping/>
+  </p:clrMapOvr>
+</p:notes>
+</file>
+
+<file path=ppt/notesSlides/notesSlide15.xml><?xml version="1.0" encoding="utf-8"?>
+<p:notes xmlns:a="http://schemas.openxmlformats.org/drawingml/2006/main" xmlns:r="http://schemas.openxmlformats.org/officeDocument/2006/relationships" xmlns:p="http://schemas.openxmlformats.org/presentationml/2006/main">
+  <p:cSld>
+    <p:spTree>
+      <p:nvGrpSpPr>
+        <p:cNvPr id="1" name=""/>
+        <p:cNvGrpSpPr/>
+        <p:nvPr/>
+      </p:nvGrpSpPr>
+      <p:grpSpPr>
+        <a:xfrm>
+          <a:off x="0" y="0"/>
+          <a:ext cx="0" cy="0"/>
+          <a:chOff x="0" y="0"/>
+          <a:chExt cx="0" cy="0"/>
+        </a:xfrm>
+      </p:grpSpPr>
+      <p:sp>
+        <p:nvSpPr>
+          <p:cNvPr id="2" name="スライド イメージ プレースホルダー 1"/>
+          <p:cNvSpPr>
+            <a:spLocks noGrp="1" noRot="1" noChangeAspect="1"/>
+          </p:cNvSpPr>
+          <p:nvPr>
+            <p:ph type="sldImg"/>
+          </p:nvPr>
+        </p:nvSpPr>
+        <p:spPr/>
+      </p:sp>
+      <p:sp>
+        <p:nvSpPr>
+          <p:cNvPr id="3" name="ノート プレースホルダー 2"/>
+          <p:cNvSpPr>
+            <a:spLocks noGrp="1"/>
+          </p:cNvSpPr>
+          <p:nvPr>
+            <p:ph type="body" idx="1"/>
+          </p:nvPr>
+        </p:nvSpPr>
+        <p:spPr/>
+        <p:txBody>
+          <a:bodyPr/>
+          <a:lstStyle/>
+          <a:p>
+            <a:r>
+              <a:rPr lang="en-US" altLang="ja-JP" dirty="0"/>
+              <a:t>1</a:t>
+            </a:r>
+            <a:r>
+              <a:rPr lang="ja-JP" altLang="en-US" dirty="0"/>
+              <a:t>つ目は、</a:t>
+            </a:r>
+            <a:r>
+              <a:rPr lang="en-US" altLang="ja-JP" b="0" dirty="0"/>
+              <a:t>『</a:t>
+            </a:r>
+            <a:r>
+              <a:rPr lang="ja-JP" altLang="en-US" b="0" dirty="0"/>
+              <a:t>撮りっぱなしにさせない</a:t>
+            </a:r>
+            <a:r>
+              <a:rPr lang="en-US" altLang="ja-JP" b="0" dirty="0"/>
+              <a:t>』</a:t>
+            </a:r>
+            <a:r>
+              <a:rPr lang="ja-JP" altLang="en-US" b="0" dirty="0"/>
+              <a:t>ためのリアルタイム判定</a:t>
+            </a:r>
+            <a:r>
+              <a:rPr lang="ja-JP" altLang="en-US" dirty="0"/>
+              <a:t>です。 従来の管理アプリは写真を保存するだけのものでしたが、本システムでは </a:t>
+            </a:r>
+            <a:r>
+              <a:rPr lang="en-US" altLang="ja-JP" dirty="0" err="1"/>
+              <a:t>Everypixel</a:t>
+            </a:r>
+            <a:r>
+              <a:rPr lang="en-US" altLang="ja-JP" dirty="0"/>
+              <a:t> API </a:t>
+            </a:r>
+            <a:r>
+              <a:rPr lang="ja-JP" altLang="en-US" dirty="0"/>
+              <a:t>という画像認識</a:t>
+            </a:r>
+            <a:r>
+              <a:rPr lang="en-US" altLang="ja-JP" dirty="0"/>
+              <a:t>AI</a:t>
+            </a:r>
+            <a:r>
+              <a:rPr lang="ja-JP" altLang="en-US" dirty="0"/>
+              <a:t>を連携させました。 ユーザーがお薬を撮影した瞬間に、</a:t>
+            </a:r>
+            <a:r>
+              <a:rPr lang="en-US" altLang="ja-JP" dirty="0"/>
+              <a:t>AI</a:t>
+            </a:r>
+            <a:r>
+              <a:rPr lang="ja-JP" altLang="en-US" dirty="0"/>
+              <a:t>が画像内に</a:t>
+            </a:r>
+            <a:r>
+              <a:rPr lang="en-US" altLang="ja-JP" dirty="0"/>
+              <a:t>『</a:t>
+            </a:r>
+            <a:r>
+              <a:rPr lang="ja-JP" altLang="en-US" dirty="0"/>
+              <a:t>錠剤やカプセル</a:t>
+            </a:r>
+            <a:r>
+              <a:rPr lang="en-US" altLang="ja-JP" dirty="0"/>
+              <a:t>』</a:t>
+            </a:r>
+            <a:r>
+              <a:rPr lang="ja-JP" altLang="en-US" dirty="0"/>
+              <a:t>があるかを自動判別します。その場で</a:t>
+            </a:r>
+            <a:r>
+              <a:rPr lang="en-US" altLang="ja-JP" dirty="0"/>
+              <a:t>『</a:t>
+            </a:r>
+            <a:r>
+              <a:rPr lang="ja-JP" altLang="en-US" dirty="0"/>
+              <a:t>お薬を確認しました</a:t>
+            </a:r>
+            <a:r>
+              <a:rPr lang="en-US" altLang="ja-JP" dirty="0"/>
+              <a:t>』</a:t>
+            </a:r>
+            <a:r>
+              <a:rPr lang="ja-JP" altLang="en-US" dirty="0"/>
+              <a:t>というフィードバックを出すことで、飲み間違いや、空のコップだけを撮るといったミスを未然に防ぐ仕組みを構築しました。</a:t>
+            </a:r>
+            <a:endParaRPr lang="en-US" altLang="ja-JP" dirty="0"/>
+          </a:p>
+          <a:p>
+            <a:r>
+              <a:rPr lang="en-US" altLang="ja-JP" dirty="0"/>
+              <a:t>2</a:t>
+            </a:r>
+            <a:r>
+              <a:rPr lang="ja-JP" altLang="en-US" dirty="0"/>
+              <a:t>つ目は、</a:t>
+            </a:r>
+            <a:r>
+              <a:rPr lang="ja-JP" altLang="en-US" b="0" dirty="0"/>
+              <a:t>開発のトラブルに対する柔軟な対応</a:t>
+            </a:r>
+            <a:r>
+              <a:rPr lang="ja-JP" altLang="en-US" dirty="0"/>
+              <a:t>です。 当初は </a:t>
+            </a:r>
+            <a:r>
+              <a:rPr lang="en-US" altLang="ja-JP" dirty="0"/>
+              <a:t>Google </a:t>
+            </a:r>
+            <a:r>
+              <a:rPr lang="ja-JP" altLang="en-US" dirty="0"/>
+              <a:t>の </a:t>
+            </a:r>
+            <a:r>
+              <a:rPr lang="en-US" altLang="ja-JP" dirty="0"/>
+              <a:t>Gemini API </a:t>
+            </a:r>
+            <a:r>
+              <a:rPr lang="ja-JP" altLang="en-US" dirty="0"/>
+              <a:t>を使った高度な解析を予定していましたが、地域制限や接続エラーといった技術的な壁に直面しました。 そこで、技術に固執するのではなく</a:t>
+            </a:r>
+            <a:r>
+              <a:rPr lang="en-US" altLang="ja-JP" dirty="0"/>
+              <a:t>『</a:t>
+            </a:r>
+            <a:r>
+              <a:rPr lang="ja-JP" altLang="en-US" dirty="0"/>
+              <a:t>システムを安定して動かすこと</a:t>
+            </a:r>
+            <a:r>
+              <a:rPr lang="en-US" altLang="ja-JP" dirty="0"/>
+              <a:t>』</a:t>
+            </a:r>
+            <a:r>
+              <a:rPr lang="ja-JP" altLang="en-US" dirty="0"/>
+              <a:t>を最優先し、迅速に </a:t>
+            </a:r>
+            <a:r>
+              <a:rPr lang="en-US" altLang="ja-JP" dirty="0" err="1"/>
+              <a:t>Everypixel</a:t>
+            </a:r>
+            <a:r>
+              <a:rPr lang="en-US" altLang="ja-JP" dirty="0"/>
+              <a:t> API </a:t>
+            </a:r>
+            <a:r>
+              <a:rPr lang="ja-JP" altLang="en-US" dirty="0" err="1"/>
+              <a:t>への</a:t>
+            </a:r>
+            <a:r>
+              <a:rPr lang="ja-JP" altLang="en-US" dirty="0"/>
+              <a:t>切り替えを判断しました。結果として、レスポンスが速く、かつ正確に動作する堅牢なシステムを完成させることができました。</a:t>
+            </a:r>
+            <a:endParaRPr lang="en-US" altLang="ja-JP" dirty="0"/>
+          </a:p>
+          <a:p>
+            <a:r>
+              <a:rPr lang="en-US" altLang="ja-JP" dirty="0"/>
+              <a:t>3</a:t>
+            </a:r>
+            <a:r>
+              <a:rPr lang="ja-JP" altLang="en-US" dirty="0"/>
+              <a:t>つ目は、</a:t>
+            </a:r>
+            <a:r>
+              <a:rPr lang="ja-JP" altLang="en-US" b="0" dirty="0"/>
+              <a:t>迷わせないための</a:t>
+            </a:r>
+            <a:r>
+              <a:rPr lang="en-US" altLang="ja-JP" b="0" dirty="0"/>
+              <a:t>UI/UX</a:t>
+            </a:r>
+            <a:r>
+              <a:rPr lang="ja-JP" altLang="en-US" b="0" dirty="0"/>
+              <a:t>設計</a:t>
+            </a:r>
+            <a:r>
+              <a:rPr lang="ja-JP" altLang="en-US" dirty="0"/>
+              <a:t>です。 ターゲットにはデジタル機器に不慣れなお年寄りも含まれるため、操作を</a:t>
+            </a:r>
+            <a:r>
+              <a:rPr lang="en-US" altLang="ja-JP" dirty="0"/>
+              <a:t>『</a:t>
+            </a:r>
+            <a:r>
+              <a:rPr lang="ja-JP" altLang="en-US" dirty="0"/>
+              <a:t>カメラ起動から撮影</a:t>
+            </a:r>
+            <a:r>
+              <a:rPr lang="en-US" altLang="ja-JP" dirty="0"/>
+              <a:t>』</a:t>
+            </a:r>
+            <a:r>
+              <a:rPr lang="ja-JP" altLang="en-US" dirty="0" err="1"/>
+              <a:t>までの</a:t>
+            </a:r>
+            <a:r>
+              <a:rPr lang="ja-JP" altLang="en-US" dirty="0"/>
+              <a:t>最少ステップに絞り込みました。 また、判定結果を文字だけでなく</a:t>
+            </a:r>
+            <a:r>
+              <a:rPr lang="en-US" altLang="ja-JP" dirty="0"/>
+              <a:t>『</a:t>
+            </a:r>
+            <a:r>
+              <a:rPr lang="ja-JP" altLang="en-US" dirty="0"/>
+              <a:t>青と赤のバッジ</a:t>
+            </a:r>
+            <a:r>
+              <a:rPr lang="en-US" altLang="ja-JP" dirty="0"/>
+              <a:t>』</a:t>
+            </a:r>
+            <a:r>
+              <a:rPr lang="ja-JP" altLang="en-US" dirty="0"/>
+              <a:t>で視覚的に色分けすることで、一目で状況が伝わる直感的なインターフェースを追求しました。</a:t>
+            </a:r>
+            <a:r>
+              <a:rPr lang="en-US" altLang="ja-JP" dirty="0"/>
+              <a:t>(</a:t>
+            </a:r>
+            <a:r>
+              <a:rPr lang="ja-JP" altLang="en-US" dirty="0"/>
+              <a:t>高橋</a:t>
+            </a:r>
+            <a:r>
+              <a:rPr lang="en-US" altLang="ja-JP" dirty="0"/>
+              <a:t>)</a:t>
+            </a:r>
+            <a:endParaRPr kumimoji="1" lang="ja-JP" altLang="en-US" dirty="0"/>
+          </a:p>
+        </p:txBody>
+      </p:sp>
+      <p:sp>
+        <p:nvSpPr>
+          <p:cNvPr id="4" name="スライド番号プレースホルダー 3"/>
+          <p:cNvSpPr>
+            <a:spLocks noGrp="1"/>
+          </p:cNvSpPr>
+          <p:nvPr>
+            <p:ph type="sldNum" sz="quarter" idx="5"/>
+          </p:nvPr>
+        </p:nvSpPr>
+        <p:spPr/>
+        <p:txBody>
+          <a:bodyPr/>
+          <a:lstStyle/>
+          <a:p>
+            <a:fld id="{0F42E968-90FD-4F25-A217-59DBD6DA5208}" type="slidenum">
+              <a:rPr kumimoji="1" lang="ja-JP" altLang="en-US" smtClean="0"/>
+              <a:t>15</a:t>
+            </a:fld>
+            <a:endParaRPr kumimoji="1" lang="ja-JP" altLang="en-US"/>
+          </a:p>
+        </p:txBody>
+      </p:sp>
+    </p:spTree>
+    <p:extLst>
+      <p:ext uri="{BB962C8B-B14F-4D97-AF65-F5344CB8AC3E}">
+        <p14:creationId xmlns:p14="http://schemas.microsoft.com/office/powerpoint/2010/main" val="69244100"/>
       </p:ext>
     </p:extLst>
   </p:cSld>
@@ -9304,7 +9832,7 @@
           <a:p>
             <a:r>
               <a:rPr kumimoji="1" lang="ja-JP" altLang="en-US" dirty="0"/>
-              <a:t>山田きよえさん、女性、一人暮らし、薬は１日３回服用するように言われている。飲み忘れが月に数回、家族は遠方</a:t>
+              <a:t>山田きよえさん、女性、一人暮らし、薬は１日３回服用するように言われています。飲み忘れが月に数回あります。</a:t>
             </a:r>
           </a:p>
         </p:txBody>
@@ -10900,11 +11428,8 @@
             </a:r>
             <a:r>
               <a:rPr lang="ja-JP" altLang="en-US" dirty="0"/>
-              <a:t>薬を手に取り、アプリのカメラを起動。服薬前の錠剤、または服薬後の水が減ったコップなどを撮影します。</a:t>
-            </a:r>
-            <a:endParaRPr lang="en-US" altLang="ja-JP" dirty="0"/>
-          </a:p>
-          <a:p>
+              <a:t>薬を手に取り、アプリのカメラを起動。服薬前の錠剤を撮影します。</a:t>
+            </a:r>
             <a:endParaRPr lang="en-US" altLang="ja-JP" dirty="0"/>
           </a:p>
           <a:p>
@@ -10918,49 +11443,16 @@
             </a:r>
             <a:r>
               <a:rPr lang="ja-JP" altLang="en-US" dirty="0"/>
-              <a:t>が解析。次の</a:t>
-            </a:r>
-            <a:r>
-              <a:rPr lang="en-US" altLang="ja-JP" dirty="0"/>
-              <a:t>2</a:t>
-            </a:r>
-            <a:r>
-              <a:rPr lang="ja-JP" altLang="en-US" dirty="0"/>
-              <a:t>点を同時に判定します。</a:t>
-            </a:r>
-            <a:endParaRPr lang="en-US" altLang="ja-JP" dirty="0"/>
-          </a:p>
-          <a:p>
+              <a:t>が解析し、</a:t>
+            </a:r>
             <a:r>
               <a:rPr lang="ja-JP" altLang="en-US" b="1" dirty="0"/>
-              <a:t>① </a:t>
+              <a:t> </a:t>
             </a:r>
             <a:r>
               <a:rPr lang="ja-JP" altLang="en-US" b="0" dirty="0"/>
-              <a:t>薬局側が入力したデータをもとに薬がしっかり服薬されているかを確認します</a:t>
-            </a:r>
-            <a:endParaRPr lang="en-US" altLang="ja-JP" dirty="0"/>
-          </a:p>
-          <a:p>
-            <a:r>
-              <a:rPr lang="ja-JP" altLang="en-US" b="1" dirty="0"/>
-              <a:t>② </a:t>
-            </a:r>
-            <a:r>
-              <a:rPr lang="ja-JP" altLang="en-US" b="0" dirty="0"/>
-              <a:t>環境の適合性</a:t>
-            </a:r>
-            <a:r>
-              <a:rPr lang="en-US" altLang="ja-JP" b="1" dirty="0"/>
-              <a:t>:</a:t>
-            </a:r>
-            <a:r>
-              <a:rPr lang="ja-JP" altLang="en-US" dirty="0"/>
-              <a:t> 水、コップなど服薬を示す周辺要素を識別します</a:t>
-            </a:r>
-            <a:endParaRPr lang="en-US" altLang="ja-JP" dirty="0"/>
-          </a:p>
-          <a:p>
+              <a:t>薬局側が入力したデータをもとに薬がしっかり服薬されているかを確認します。</a:t>
+            </a:r>
             <a:endParaRPr lang="en-US" altLang="ja-JP" dirty="0"/>
           </a:p>
           <a:p>
@@ -11000,9 +11492,6 @@
               <a:rPr lang="ja-JP" altLang="en-US" dirty="0"/>
               <a:t>に記録を反映されます。</a:t>
             </a:r>
-            <a:endParaRPr lang="en-US" altLang="ja-JP" dirty="0"/>
-          </a:p>
-          <a:p>
             <a:endParaRPr lang="en-US" altLang="ja-JP" dirty="0"/>
           </a:p>
           <a:p>
@@ -11237,7 +11726,7 @@
           <a:p>
             <a:fld id="{A392706B-5D25-445B-AAE1-94FC879551FA}" type="datetimeFigureOut">
               <a:rPr kumimoji="1" lang="ja-JP" altLang="en-US" smtClean="0"/>
-              <a:t>2025/12/3</a:t>
+              <a:t>2026/2/26</a:t>
             </a:fld>
             <a:endParaRPr kumimoji="1" lang="ja-JP" altLang="en-US"/>
           </a:p>
@@ -11480,7 +11969,7 @@
           <a:p>
             <a:fld id="{A392706B-5D25-445B-AAE1-94FC879551FA}" type="datetimeFigureOut">
               <a:rPr kumimoji="1" lang="ja-JP" altLang="en-US" smtClean="0"/>
-              <a:t>2025/12/3</a:t>
+              <a:t>2026/2/26</a:t>
             </a:fld>
             <a:endParaRPr kumimoji="1" lang="ja-JP" altLang="en-US"/>
           </a:p>
@@ -11727,7 +12216,7 @@
           <a:p>
             <a:fld id="{A392706B-5D25-445B-AAE1-94FC879551FA}" type="datetimeFigureOut">
               <a:rPr kumimoji="1" lang="ja-JP" altLang="en-US" smtClean="0"/>
-              <a:t>2025/12/3</a:t>
+              <a:t>2026/2/26</a:t>
             </a:fld>
             <a:endParaRPr kumimoji="1" lang="ja-JP" altLang="en-US"/>
           </a:p>
@@ -11960,7 +12449,7 @@
           <a:p>
             <a:fld id="{A392706B-5D25-445B-AAE1-94FC879551FA}" type="datetimeFigureOut">
               <a:rPr kumimoji="1" lang="ja-JP" altLang="en-US" smtClean="0"/>
-              <a:t>2025/12/3</a:t>
+              <a:t>2026/2/26</a:t>
             </a:fld>
             <a:endParaRPr kumimoji="1" lang="ja-JP" altLang="en-US"/>
           </a:p>
@@ -12239,7 +12728,7 @@
           <a:p>
             <a:fld id="{A392706B-5D25-445B-AAE1-94FC879551FA}" type="datetimeFigureOut">
               <a:rPr kumimoji="1" lang="ja-JP" altLang="en-US" smtClean="0"/>
-              <a:t>2025/12/3</a:t>
+              <a:t>2026/2/26</a:t>
             </a:fld>
             <a:endParaRPr kumimoji="1" lang="ja-JP" altLang="en-US"/>
           </a:p>
@@ -12571,7 +13060,7 @@
           <a:p>
             <a:fld id="{A392706B-5D25-445B-AAE1-94FC879551FA}" type="datetimeFigureOut">
               <a:rPr kumimoji="1" lang="ja-JP" altLang="en-US" smtClean="0"/>
-              <a:t>2025/12/3</a:t>
+              <a:t>2026/2/26</a:t>
             </a:fld>
             <a:endParaRPr kumimoji="1" lang="ja-JP" altLang="en-US"/>
           </a:p>
@@ -13051,7 +13540,7 @@
           <a:p>
             <a:fld id="{A392706B-5D25-445B-AAE1-94FC879551FA}" type="datetimeFigureOut">
               <a:rPr kumimoji="1" lang="ja-JP" altLang="en-US" smtClean="0"/>
-              <a:t>2025/12/3</a:t>
+              <a:t>2026/2/26</a:t>
             </a:fld>
             <a:endParaRPr kumimoji="1" lang="ja-JP" altLang="en-US"/>
           </a:p>
@@ -13200,7 +13689,7 @@
           <a:p>
             <a:fld id="{A392706B-5D25-445B-AAE1-94FC879551FA}" type="datetimeFigureOut">
               <a:rPr kumimoji="1" lang="ja-JP" altLang="en-US" smtClean="0"/>
-              <a:t>2025/12/3</a:t>
+              <a:t>2026/2/26</a:t>
             </a:fld>
             <a:endParaRPr kumimoji="1" lang="ja-JP" altLang="en-US"/>
           </a:p>
@@ -13326,7 +13815,7 @@
           <a:p>
             <a:fld id="{A392706B-5D25-445B-AAE1-94FC879551FA}" type="datetimeFigureOut">
               <a:rPr kumimoji="1" lang="ja-JP" altLang="en-US" smtClean="0"/>
-              <a:t>2025/12/3</a:t>
+              <a:t>2026/2/26</a:t>
             </a:fld>
             <a:endParaRPr kumimoji="1" lang="ja-JP" altLang="en-US"/>
           </a:p>
@@ -13609,7 +14098,7 @@
           <a:p>
             <a:fld id="{A392706B-5D25-445B-AAE1-94FC879551FA}" type="datetimeFigureOut">
               <a:rPr kumimoji="1" lang="ja-JP" altLang="en-US" smtClean="0"/>
-              <a:t>2025/12/3</a:t>
+              <a:t>2026/2/26</a:t>
             </a:fld>
             <a:endParaRPr kumimoji="1" lang="ja-JP" altLang="en-US"/>
           </a:p>
@@ -14054,7 +14543,7 @@
           <a:p>
             <a:fld id="{A392706B-5D25-445B-AAE1-94FC879551FA}" type="datetimeFigureOut">
               <a:rPr kumimoji="1" lang="ja-JP" altLang="en-US" smtClean="0"/>
-              <a:t>2025/12/3</a:t>
+              <a:t>2026/2/26</a:t>
             </a:fld>
             <a:endParaRPr kumimoji="1" lang="ja-JP" altLang="en-US"/>
           </a:p>
@@ -14380,7 +14869,7 @@
           <a:p>
             <a:fld id="{A392706B-5D25-445B-AAE1-94FC879551FA}" type="datetimeFigureOut">
               <a:rPr kumimoji="1" lang="ja-JP" altLang="en-US" smtClean="0"/>
-              <a:t>2025/12/3</a:t>
+              <a:t>2026/2/26</a:t>
             </a:fld>
             <a:endParaRPr kumimoji="1" lang="ja-JP" altLang="en-US"/>
           </a:p>
@@ -15549,13 +16038,13 @@
         </p:nvSpPr>
         <p:spPr>
           <a:xfrm>
-            <a:off x="1451579" y="2284673"/>
-            <a:ext cx="9603275" cy="2988515"/>
+            <a:off x="1451579" y="2011296"/>
+            <a:ext cx="9603275" cy="3881929"/>
           </a:xfrm>
         </p:spPr>
         <p:txBody>
           <a:bodyPr>
-            <a:normAutofit lnSpcReduction="10000"/>
+            <a:normAutofit/>
           </a:bodyPr>
           <a:lstStyle/>
           <a:p>
@@ -15632,39 +16121,6 @@
               </a:rPr>
               <a:t>)</a:t>
             </a:r>
-          </a:p>
-          <a:p>
-            <a:pPr marL="0" indent="0">
-              <a:buNone/>
-            </a:pPr>
-            <a:r>
-              <a:rPr kumimoji="1" lang="ja-JP" altLang="en-US" sz="2800" dirty="0">
-                <a:latin typeface="ＭＳ 明朝" panose="02020609040205080304" pitchFamily="17" charset="-128"/>
-                <a:ea typeface="ＭＳ 明朝" panose="02020609040205080304" pitchFamily="17" charset="-128"/>
-              </a:rPr>
-              <a:t>通知</a:t>
-            </a:r>
-            <a:r>
-              <a:rPr kumimoji="1" lang="en-US" altLang="ja-JP" sz="2800" dirty="0">
-                <a:latin typeface="ＭＳ 明朝" panose="02020609040205080304" pitchFamily="17" charset="-128"/>
-                <a:ea typeface="ＭＳ 明朝" panose="02020609040205080304" pitchFamily="17" charset="-128"/>
-              </a:rPr>
-              <a:t>: </a:t>
-            </a:r>
-            <a:r>
-              <a:rPr lang="en-US" altLang="ja-JP" sz="2800" dirty="0">
-                <a:latin typeface="ＭＳ 明朝" panose="02020609040205080304" pitchFamily="17" charset="-128"/>
-                <a:ea typeface="ＭＳ 明朝" panose="02020609040205080304" pitchFamily="17" charset="-128"/>
-              </a:rPr>
-              <a:t>Notification API + PHP</a:t>
-            </a:r>
-            <a:r>
-              <a:rPr lang="ja-JP" altLang="en-US" sz="2800" dirty="0">
-                <a:latin typeface="ＭＳ 明朝" panose="02020609040205080304" pitchFamily="17" charset="-128"/>
-                <a:ea typeface="ＭＳ 明朝" panose="02020609040205080304" pitchFamily="17" charset="-128"/>
-              </a:rPr>
-              <a:t>スケジュールチェック</a:t>
-            </a:r>
             <a:endParaRPr lang="en-US" altLang="ja-JP" sz="2800" dirty="0">
               <a:latin typeface="ＭＳ 明朝" panose="02020609040205080304" pitchFamily="17" charset="-128"/>
               <a:ea typeface="ＭＳ 明朝" panose="02020609040205080304" pitchFamily="17" charset="-128"/>
@@ -15702,6 +16158,83 @@
               </a:rPr>
               <a:t>サーバー</a:t>
             </a:r>
+            <a:endParaRPr lang="en-US" altLang="ja-JP" sz="2800" dirty="0">
+              <a:latin typeface="ＭＳ 明朝" panose="02020609040205080304" pitchFamily="17" charset="-128"/>
+              <a:ea typeface="ＭＳ 明朝" panose="02020609040205080304" pitchFamily="17" charset="-128"/>
+            </a:endParaRPr>
+          </a:p>
+          <a:p>
+            <a:pPr marL="0" indent="0">
+              <a:buNone/>
+            </a:pPr>
+            <a:r>
+              <a:rPr lang="en-US" altLang="ja-JP" sz="2800" dirty="0">
+                <a:latin typeface="ＭＳ 明朝" panose="02020609040205080304" pitchFamily="17" charset="-128"/>
+                <a:ea typeface="ＭＳ 明朝" panose="02020609040205080304" pitchFamily="17" charset="-128"/>
+              </a:rPr>
+              <a:t>API: </a:t>
+            </a:r>
+            <a:r>
+              <a:rPr lang="en-US" altLang="ja-JP" sz="2800" dirty="0" err="1">
+                <a:latin typeface="ＭＳ 明朝" panose="02020609040205080304" pitchFamily="17" charset="-128"/>
+                <a:ea typeface="ＭＳ 明朝" panose="02020609040205080304" pitchFamily="17" charset="-128"/>
+              </a:rPr>
+              <a:t>Everypixel</a:t>
+            </a:r>
+            <a:r>
+              <a:rPr lang="en-US" altLang="ja-JP" sz="2800" dirty="0">
+                <a:latin typeface="ＭＳ 明朝" panose="02020609040205080304" pitchFamily="17" charset="-128"/>
+                <a:ea typeface="ＭＳ 明朝" panose="02020609040205080304" pitchFamily="17" charset="-128"/>
+              </a:rPr>
+              <a:t> API(</a:t>
+            </a:r>
+            <a:r>
+              <a:rPr lang="ja-JP" altLang="en-US" sz="2800" dirty="0">
+                <a:latin typeface="ＭＳ 明朝" panose="02020609040205080304" pitchFamily="17" charset="-128"/>
+                <a:ea typeface="ＭＳ 明朝" panose="02020609040205080304" pitchFamily="17" charset="-128"/>
+              </a:rPr>
+              <a:t>画像認識</a:t>
+            </a:r>
+            <a:r>
+              <a:rPr lang="en-US" altLang="ja-JP" sz="2800" dirty="0">
+                <a:latin typeface="ＭＳ 明朝" panose="02020609040205080304" pitchFamily="17" charset="-128"/>
+                <a:ea typeface="ＭＳ 明朝" panose="02020609040205080304" pitchFamily="17" charset="-128"/>
+              </a:rPr>
+              <a:t>API)</a:t>
+            </a:r>
+          </a:p>
+          <a:p>
+            <a:pPr marL="0" indent="0">
+              <a:buNone/>
+            </a:pPr>
+            <a:r>
+              <a:rPr lang="ja-JP" altLang="en-US" sz="2800" dirty="0">
+                <a:latin typeface="ＭＳ 明朝" panose="02020609040205080304" pitchFamily="17" charset="-128"/>
+                <a:ea typeface="ＭＳ 明朝" panose="02020609040205080304" pitchFamily="17" charset="-128"/>
+              </a:rPr>
+              <a:t>バージョン管理</a:t>
+            </a:r>
+            <a:r>
+              <a:rPr lang="en-US" altLang="ja-JP" sz="2800" dirty="0">
+                <a:latin typeface="ＭＳ 明朝" panose="02020609040205080304" pitchFamily="17" charset="-128"/>
+                <a:ea typeface="ＭＳ 明朝" panose="02020609040205080304" pitchFamily="17" charset="-128"/>
+              </a:rPr>
+              <a:t>: GitHub</a:t>
+            </a:r>
+          </a:p>
+          <a:p>
+            <a:pPr marL="0" indent="0">
+              <a:buNone/>
+            </a:pPr>
+            <a:endParaRPr lang="en-US" altLang="ja-JP" sz="2800" dirty="0">
+              <a:latin typeface="ＭＳ 明朝" panose="02020609040205080304" pitchFamily="17" charset="-128"/>
+              <a:ea typeface="ＭＳ 明朝" panose="02020609040205080304" pitchFamily="17" charset="-128"/>
+            </a:endParaRPr>
+          </a:p>
+          <a:p>
+            <a:pPr marL="0" indent="0">
+              <a:buNone/>
+            </a:pPr>
             <a:endParaRPr kumimoji="1" lang="en-US" altLang="ja-JP" sz="2800" dirty="0">
               <a:latin typeface="ＭＳ 明朝" panose="02020609040205080304" pitchFamily="17" charset="-128"/>
               <a:ea typeface="ＭＳ 明朝" panose="02020609040205080304" pitchFamily="17" charset="-128"/>
@@ -15973,7 +16506,7 @@
                 <a:latin typeface="ＭＳ 明朝" panose="02020609040205080304" pitchFamily="17" charset="-128"/>
                 <a:ea typeface="ＭＳ 明朝" panose="02020609040205080304" pitchFamily="17" charset="-128"/>
               </a:rPr>
-              <a:t>抱負</a:t>
+              <a:t>工夫した点</a:t>
             </a:r>
           </a:p>
         </p:txBody>
@@ -15996,8 +16529,8 @@
         </p:nvSpPr>
         <p:spPr>
           <a:xfrm>
-            <a:off x="208253" y="2302602"/>
-            <a:ext cx="11775493" cy="4151986"/>
+            <a:off x="3398846" y="2217761"/>
+            <a:ext cx="5394308" cy="3560870"/>
           </a:xfrm>
         </p:spPr>
         <p:txBody>
@@ -16010,12 +16543,71 @@
               <a:buNone/>
             </a:pPr>
             <a:r>
-              <a:rPr lang="en-US" altLang="ja-JP" sz="2800" dirty="0">
+              <a:rPr lang="ja-JP" altLang="en-US" sz="2800" dirty="0">
                 <a:latin typeface="ＭＳ 明朝" panose="02020609040205080304" pitchFamily="17" charset="-128"/>
                 <a:ea typeface="ＭＳ 明朝" panose="02020609040205080304" pitchFamily="17" charset="-128"/>
               </a:rPr>
-              <a:t>	</a:t>
-            </a:r>
+              <a:t>①実用的なフィードバック</a:t>
+            </a:r>
+            <a:endParaRPr lang="en-US" altLang="ja-JP" sz="2800" dirty="0">
+              <a:latin typeface="ＭＳ 明朝" panose="02020609040205080304" pitchFamily="17" charset="-128"/>
+              <a:ea typeface="ＭＳ 明朝" panose="02020609040205080304" pitchFamily="17" charset="-128"/>
+            </a:endParaRPr>
+          </a:p>
+          <a:p>
+            <a:pPr marL="0" indent="0">
+              <a:buNone/>
+            </a:pPr>
+            <a:endParaRPr lang="en-US" altLang="ja-JP" sz="2800" dirty="0">
+              <a:latin typeface="ＭＳ 明朝" panose="02020609040205080304" pitchFamily="17" charset="-128"/>
+              <a:ea typeface="ＭＳ 明朝" panose="02020609040205080304" pitchFamily="17" charset="-128"/>
+            </a:endParaRPr>
+          </a:p>
+          <a:p>
+            <a:pPr marL="0" indent="0">
+              <a:buNone/>
+            </a:pPr>
+            <a:r>
+              <a:rPr lang="ja-JP" altLang="en-US" sz="2800" dirty="0">
+                <a:latin typeface="ＭＳ 明朝" panose="02020609040205080304" pitchFamily="17" charset="-128"/>
+                <a:ea typeface="ＭＳ 明朝" panose="02020609040205080304" pitchFamily="17" charset="-128"/>
+              </a:rPr>
+              <a:t>②柔軟な技術選定と課題解決</a:t>
+            </a:r>
+            <a:endParaRPr lang="en-US" altLang="ja-JP" sz="2800" dirty="0">
+              <a:latin typeface="ＭＳ 明朝" panose="02020609040205080304" pitchFamily="17" charset="-128"/>
+              <a:ea typeface="ＭＳ 明朝" panose="02020609040205080304" pitchFamily="17" charset="-128"/>
+            </a:endParaRPr>
+          </a:p>
+          <a:p>
+            <a:pPr marL="0" indent="0">
+              <a:buNone/>
+            </a:pPr>
+            <a:endParaRPr lang="en-US" altLang="ja-JP" sz="2800" dirty="0">
+              <a:latin typeface="ＭＳ 明朝" panose="02020609040205080304" pitchFamily="17" charset="-128"/>
+              <a:ea typeface="ＭＳ 明朝" panose="02020609040205080304" pitchFamily="17" charset="-128"/>
+            </a:endParaRPr>
+          </a:p>
+          <a:p>
+            <a:pPr marL="0" indent="0">
+              <a:buNone/>
+            </a:pPr>
+            <a:r>
+              <a:rPr lang="ja-JP" altLang="en-US" sz="2800" dirty="0">
+                <a:latin typeface="ＭＳ 明朝" panose="02020609040205080304" pitchFamily="17" charset="-128"/>
+                <a:ea typeface="ＭＳ 明朝" panose="02020609040205080304" pitchFamily="17" charset="-128"/>
+              </a:rPr>
+              <a:t>③徹底したシンプル操作</a:t>
+            </a:r>
+            <a:endParaRPr lang="en-US" altLang="ja-JP" sz="2800" dirty="0">
+              <a:latin typeface="ＭＳ 明朝" panose="02020609040205080304" pitchFamily="17" charset="-128"/>
+              <a:ea typeface="ＭＳ 明朝" panose="02020609040205080304" pitchFamily="17" charset="-128"/>
+            </a:endParaRPr>
+          </a:p>
+          <a:p>
+            <a:pPr marL="0" indent="0">
+              <a:buNone/>
+            </a:pPr>
             <a:endParaRPr kumimoji="1" lang="en-US" altLang="ja-JP" sz="2800" dirty="0">
               <a:latin typeface="ＭＳ 明朝" panose="02020609040205080304" pitchFamily="17" charset="-128"/>
               <a:ea typeface="ＭＳ 明朝" panose="02020609040205080304" pitchFamily="17" charset="-128"/>
@@ -16025,11 +16617,10 @@
             <a:pPr marL="0" indent="0">
               <a:buNone/>
             </a:pPr>
-            <a:r>
-              <a:rPr lang="en-US" altLang="ja-JP" dirty="0"/>
-              <a:t>	</a:t>
-            </a:r>
-            <a:endParaRPr kumimoji="1" lang="ja-JP" altLang="en-US" dirty="0"/>
+            <a:endParaRPr kumimoji="1" lang="ja-JP" altLang="en-US" sz="2800" dirty="0">
+              <a:latin typeface="ＭＳ 明朝" panose="02020609040205080304" pitchFamily="17" charset="-128"/>
+              <a:ea typeface="ＭＳ 明朝" panose="02020609040205080304" pitchFamily="17" charset="-128"/>
+            </a:endParaRPr>
           </a:p>
         </p:txBody>
       </p:sp>
@@ -16468,8 +17059,8 @@
         </p:nvSpPr>
         <p:spPr>
           <a:xfrm>
-            <a:off x="453983" y="2714625"/>
-            <a:ext cx="11284033" cy="1422233"/>
+            <a:off x="1264688" y="2334287"/>
+            <a:ext cx="9067089" cy="1422233"/>
           </a:xfrm>
         </p:spPr>
         <p:txBody>
@@ -16533,7 +17124,7 @@
                 <a:latin typeface="ＭＳ 明朝" panose="02020609040205080304" pitchFamily="17" charset="-128"/>
                 <a:ea typeface="ＭＳ 明朝" panose="02020609040205080304" pitchFamily="17" charset="-128"/>
               </a:rPr>
-              <a:t>回、飲み忘れが月に数回、家族は遠方へ</a:t>
+              <a:t>回、飲み忘れが月に数回</a:t>
             </a:r>
             <a:endParaRPr kumimoji="1" lang="ja-JP" altLang="en-US" sz="2800" dirty="0">
               <a:latin typeface="ＭＳ 明朝" panose="02020609040205080304" pitchFamily="17" charset="-128"/>
@@ -16570,7 +17161,7 @@
         </p:blipFill>
         <p:spPr>
           <a:xfrm>
-            <a:off x="9174832" y="4143375"/>
+            <a:off x="9193686" y="3756520"/>
             <a:ext cx="2714625" cy="2714625"/>
           </a:xfrm>
           <a:prstGeom prst="rect">
@@ -16665,8 +17256,8 @@
         </p:nvSpPr>
         <p:spPr>
           <a:xfrm>
-            <a:off x="1447915" y="1853334"/>
-            <a:ext cx="9517844" cy="4351338"/>
+            <a:off x="1447915" y="2083324"/>
+            <a:ext cx="9517844" cy="4121348"/>
           </a:xfrm>
         </p:spPr>
         <p:txBody>
@@ -16674,15 +17265,6 @@
             <a:noAutofit/>
           </a:bodyPr>
           <a:lstStyle/>
-          <a:p>
-            <a:pPr marL="0" indent="0">
-              <a:buNone/>
-            </a:pPr>
-            <a:endParaRPr kumimoji="1" lang="en-US" altLang="ja-JP" sz="2200" dirty="0">
-              <a:latin typeface="ＭＳ 明朝" panose="02020609040205080304" pitchFamily="17" charset="-128"/>
-              <a:ea typeface="ＭＳ 明朝" panose="02020609040205080304" pitchFamily="17" charset="-128"/>
-            </a:endParaRPr>
-          </a:p>
           <a:p>
             <a:pPr marL="0" indent="0">
               <a:buNone/>
